--- a/assets/powerpoints/module-n2-guichet/A3-quarante-dollars-et-cinquante-cents.pptx
+++ b/assets/powerpoints/module-n2-guichet/A3-quarante-dollars-et-cinquante-cents.pptx
@@ -7921,7 +7921,25 @@
                 </a:solidFill>
                 <a:latin typeface="Verdana"/>
               </a:rPr>
-              <a:t>Les cents suivent la même règle : &lt;b&gt;vingt-cinq cents&lt;/b&gt;. Et le signe $ ne se dit pas — il s'écrit après le nombre, avec une espace : 40 $.</a:t>
+              <a:t>Les cents suivent la même règle : </a:t>
+            </a:r>
+            <a:r>
+              <a:rPr sz="2000" b="1" i="0">
+                <a:solidFill>
+                  <a:srgbClr val="4B4F52"/>
+                </a:solidFill>
+                <a:latin typeface="Verdana"/>
+              </a:rPr>
+              <a:t>vingt-cinq cents</a:t>
+            </a:r>
+            <a:r>
+              <a:rPr sz="2000" b="0" i="0">
+                <a:solidFill>
+                  <a:srgbClr val="4B4F52"/>
+                </a:solidFill>
+                <a:latin typeface="Verdana"/>
+              </a:rPr>
+              <a:t>. Et le signe $ ne se dit pas — il s'écrit après le nombre, avec une espace : 40 $.</a:t>
             </a:r>
           </a:p>
         </p:txBody>
